--- a/classes/parte-17-profundizacion-para-certificaciones/325-forense-de-memoria-avanzado/clase-325-presentacion.pptx
+++ b/classes/parte-17-profundizacion-para-certificaciones/325-forense-de-memoria-avanzado/clase-325-presentacion.pptx
@@ -17,6 +17,10 @@
     <p:sldId id="265" r:id="rId16"/>
     <p:sldId id="266" r:id="rId17"/>
     <p:sldId id="267" r:id="rId18"/>
+    <p:sldId id="268" r:id="rId19"/>
+    <p:sldId id="269" r:id="rId20"/>
+    <p:sldId id="270" r:id="rId21"/>
+    <p:sldId id="271" r:id="rId22"/>
   </p:sldIdLst>
   <p:sldSz cx="9144000" cy="6858000" type="screen4x3"/>
   <p:notesSz cx="6858000" cy="9144000"/>
@@ -3198,7 +3202,7 @@
                   <a:srgbClr val="0B3D2E"/>
                 </a:solidFill>
               </a:rPr>
-              <a:t>⚠️ Errores comunes</a:t>
+              <a:t>🧪 Laboratorio guiado</a:t>
             </a:r>
           </a:p>
         </p:txBody>
@@ -3236,82 +3240,97 @@
                   <a:srgbClr val="22282E"/>
                 </a:solidFill>
               </a:rPr>
-              <a:t>•  Unable to validate the plugin requirements / no symbols — El ISF del kernel no se resolvió; actualiza volatility3 y sus symbol packs, o descarga el pack de símbolos correspondiente al build de Windows</a:t>
-            </a:r>
-          </a:p>
-          <a:p>
-            <a:pPr>
-              <a:spcAft>
-                <a:spcPts val="600"/>
-              </a:spcAft>
-            </a:pPr>
-            <a:r>
-              <a:rPr sz="1500">
-                <a:solidFill>
-                  <a:srgbClr val="22282E"/>
-                </a:solidFill>
-              </a:rPr>
-              <a:t>•  pslist no muestra un proceso que sabes que existía — Ocultamiento por DKOM; usa psscan que barre el pool en vez de seguir la lista enlazada</a:t>
-            </a:r>
-          </a:p>
-          <a:p>
-            <a:pPr>
-              <a:spcAft>
-                <a:spcPts val="600"/>
-              </a:spcAft>
-            </a:pPr>
-            <a:r>
-              <a:rPr sz="1500">
-                <a:solidFill>
-                  <a:srgbClr val="22282E"/>
-                </a:solidFill>
-              </a:rPr>
-              <a:t>•  malfind arroja decenas de hits — Muchos son legítimos (JIT de navegadores, .NET); filtra por regiones RWX privadas con contenido tipo MZ/shellcode</a:t>
-            </a:r>
-          </a:p>
-          <a:p>
-            <a:pPr>
-              <a:spcAft>
-                <a:spcPts val="600"/>
-              </a:spcAft>
-            </a:pPr>
-            <a:r>
-              <a:rPr sz="1500">
-                <a:solidFill>
-                  <a:srgbClr val="22282E"/>
-                </a:solidFill>
-              </a:rPr>
-              <a:t>•  Volcado tomado con la VM en ejecución da datos inconsistentes — Se capturó mientras la memoria cambiaba; para VMs prefiere pausar y usar el archivo .vmem/snapshot</a:t>
-            </a:r>
-          </a:p>
-          <a:p>
-            <a:pPr>
-              <a:spcAft>
-                <a:spcPts val="600"/>
-              </a:spcAft>
-            </a:pPr>
-            <a:r>
-              <a:rPr sz="1500">
-                <a:solidFill>
-                  <a:srgbClr val="22282E"/>
-                </a:solidFill>
-              </a:rPr>
-              <a:t>•  netscan no muestra conexiones esperadas — Kernel muy nuevo o pool reciclado; complementa con artefactos de disco (Sysmon Event ID 3)</a:t>
-            </a:r>
-          </a:p>
-          <a:p>
-            <a:pPr>
-              <a:spcAft>
-                <a:spcPts val="600"/>
-              </a:spcAft>
-            </a:pPr>
-            <a:r>
-              <a:rPr sz="1500">
-                <a:solidFill>
-                  <a:srgbClr val="22282E"/>
-                </a:solidFill>
-              </a:rPr>
-              <a:t>•  Hashes distintos del mismo volcado en dos equipos — Copia incompleta o corrupción de transferencia; re-copia y verifica cadena de custodia</a:t>
+              <a:t>•  Trabajaremos sobre un volcado Windows llamado caso.raw. Reemplaza el nombre por tu muestra de práctica.</a:t>
+            </a:r>
+          </a:p>
+          <a:p>
+            <a:pPr>
+              <a:spcAft>
+                <a:spcPts val="600"/>
+              </a:spcAft>
+            </a:pPr>
+            <a:r>
+              <a:rPr sz="1500">
+                <a:solidFill>
+                  <a:srgbClr val="22282E"/>
+                </a:solidFill>
+              </a:rPr>
+              <a:t>•  Preserva la evidencia. Antes de tocar nada, calcula y registra el hash:</a:t>
+            </a:r>
+          </a:p>
+          <a:p>
+            <a:pPr>
+              <a:spcAft>
+                <a:spcPts val="600"/>
+              </a:spcAft>
+            </a:pPr>
+            <a:r>
+              <a:rPr sz="1500">
+                <a:solidFill>
+                  <a:srgbClr val="22282E"/>
+                </a:solidFill>
+              </a:rPr>
+              <a:t>•  Identifica el perfil/entorno del volcado:</a:t>
+            </a:r>
+          </a:p>
+          <a:p>
+            <a:pPr>
+              <a:spcAft>
+                <a:spcPts val="600"/>
+              </a:spcAft>
+            </a:pPr>
+            <a:r>
+              <a:rPr sz="1500">
+                <a:solidFill>
+                  <a:srgbClr val="22282E"/>
+                </a:solidFill>
+              </a:rPr>
+              <a:t>•  Anota versión de kernel, arquitectura y hora del sistema: fija el marco temporal del análisis.</a:t>
+            </a:r>
+          </a:p>
+          <a:p>
+            <a:pPr>
+              <a:spcAft>
+                <a:spcPts val="600"/>
+              </a:spcAft>
+            </a:pPr>
+            <a:r>
+              <a:rPr sz="1500">
+                <a:solidFill>
+                  <a:srgbClr val="22282E"/>
+                </a:solidFill>
+              </a:rPr>
+              <a:t>•  Enumera procesos y su jerarquía:</a:t>
+            </a:r>
+          </a:p>
+          <a:p>
+            <a:pPr>
+              <a:spcAft>
+                <a:spcPts val="600"/>
+              </a:spcAft>
+            </a:pPr>
+            <a:r>
+              <a:rPr sz="1500">
+                <a:solidFill>
+                  <a:srgbClr val="22282E"/>
+                </a:solidFill>
+              </a:rPr>
+              <a:t>•  Busca padres anómalos: winword.exe lanzando powershell.exe, o services.exe con hijos raros.</a:t>
+            </a:r>
+          </a:p>
+          <a:p>
+            <a:pPr>
+              <a:spcAft>
+                <a:spcPts val="600"/>
+              </a:spcAft>
+            </a:pPr>
+            <a:r>
+              <a:rPr sz="1500">
+                <a:solidFill>
+                  <a:srgbClr val="22282E"/>
+                </a:solidFill>
+              </a:rPr>
+              <a:t>•  Detecta procesos ocultos comparando el barrido de pool contra la lista enlazada:</a:t>
             </a:r>
           </a:p>
         </p:txBody>
@@ -3362,7 +3381,7 @@
                   <a:srgbClr val="0B3D2E"/>
                 </a:solidFill>
               </a:rPr>
-              <a:t>❓ Preguntas frecuentes</a:t>
+              <a:t>✍️ Ejercicios</a:t>
             </a:r>
           </a:p>
         </p:txBody>
@@ -3400,97 +3419,82 @@
                   <a:srgbClr val="22282E"/>
                 </a:solidFill>
               </a:rPr>
-              <a:t>•  ❓ ¿Por qué Volatility 3 ya no usa "profiles"?</a:t>
-            </a:r>
-          </a:p>
-          <a:p>
-            <a:pPr>
-              <a:spcAft>
-                <a:spcPts val="600"/>
-              </a:spcAft>
-            </a:pPr>
-            <a:r>
-              <a:rPr sz="1500">
-                <a:solidFill>
-                  <a:srgbClr val="22282E"/>
-                </a:solidFill>
-              </a:rPr>
-              <a:t>•  V3 resuelve la estructura del kernel mediante symbol tables (ISF) descargadas o generadas automáticamente a partir del build del SO, eliminando el paso manual de elegir profile que era fuente de errores en V2.</a:t>
-            </a:r>
-          </a:p>
-          <a:p>
-            <a:pPr>
-              <a:spcAft>
-                <a:spcPts val="600"/>
-              </a:spcAft>
-            </a:pPr>
-            <a:r>
-              <a:rPr sz="1500">
-                <a:solidFill>
-                  <a:srgbClr val="22282E"/>
-                </a:solidFill>
-              </a:rPr>
-              <a:t>•  ❓ ¿La adquisición altera la memoria?</a:t>
-            </a:r>
-          </a:p>
-          <a:p>
-            <a:pPr>
-              <a:spcAft>
-                <a:spcPts val="600"/>
-              </a:spcAft>
-            </a:pPr>
-            <a:r>
-              <a:rPr sz="1500">
-                <a:solidFill>
-                  <a:srgbClr val="22282E"/>
-                </a:solidFill>
-              </a:rPr>
-              <a:t>•  Sí, mínimamente: la propia herramienta ocupa RAM. Por eso se documenta la herramienta usada y se respeta el orden de volatilidad, capturando la RAM antes que cualquier acción intrusiva.</a:t>
-            </a:r>
-          </a:p>
-          <a:p>
-            <a:pPr>
-              <a:spcAft>
-                <a:spcPts val="600"/>
-              </a:spcAft>
-            </a:pPr>
-            <a:r>
-              <a:rPr sz="1500">
-                <a:solidFill>
-                  <a:srgbClr val="22282E"/>
-                </a:solidFill>
-              </a:rPr>
-              <a:t>•  ❓ ¿malfind prueba por sí solo que hay malware?</a:t>
-            </a:r>
-          </a:p>
-          <a:p>
-            <a:pPr>
-              <a:spcAft>
-                <a:spcPts val="600"/>
-              </a:spcAft>
-            </a:pPr>
-            <a:r>
-              <a:rPr sz="1500">
-                <a:solidFill>
-                  <a:srgbClr val="22282E"/>
-                </a:solidFill>
-              </a:rPr>
-              <a:t>•  No. Marca regiones sospechosas de inyección, pero hay falsos positivos legítimos. Confírmalo con el contenido de la región, la reputación del proceso y correlación con red y comandos.</a:t>
-            </a:r>
-          </a:p>
-          <a:p>
-            <a:pPr>
-              <a:spcAft>
-                <a:spcPts val="600"/>
-              </a:spcAft>
-            </a:pPr>
-            <a:r>
-              <a:rPr sz="1500">
-                <a:solidFill>
-                  <a:srgbClr val="22282E"/>
-                </a:solidFill>
-              </a:rPr>
-              <a:t>•  ❓ ¿Puedo analizar un volcado sin conocer la versión exacta de Windows?</a:t>
+              <a:t>•  Adquiere un volcado de tu propia VM de práctica con WinPmem y verifica su hash antes y después de copiarlo.</a:t>
+            </a:r>
+          </a:p>
+          <a:p>
+            <a:pPr>
+              <a:spcAft>
+                <a:spcPts val="600"/>
+              </a:spcAft>
+            </a:pPr>
+            <a:r>
+              <a:rPr sz="1500">
+                <a:solidFill>
+                  <a:srgbClr val="22282E"/>
+                </a:solidFill>
+              </a:rPr>
+              <a:t>•  En una muestra de práctica, lista los tres procesos con padre más sospechoso y justifica por qué usando pstree.</a:t>
+            </a:r>
+          </a:p>
+          <a:p>
+            <a:pPr>
+              <a:spcAft>
+                <a:spcPts val="600"/>
+              </a:spcAft>
+            </a:pPr>
+            <a:r>
+              <a:rPr sz="1500">
+                <a:solidFill>
+                  <a:srgbClr val="22282E"/>
+                </a:solidFill>
+              </a:rPr>
+              <a:t>•  Ejecuta malfind y clasifica cada hit como probable inyección o falso positivo, explicando el criterio.</a:t>
+            </a:r>
+          </a:p>
+          <a:p>
+            <a:pPr>
+              <a:spcAft>
+                <a:spcPts val="600"/>
+              </a:spcAft>
+            </a:pPr>
+            <a:r>
+              <a:rPr sz="1500">
+                <a:solidFill>
+                  <a:srgbClr val="22282E"/>
+                </a:solidFill>
+              </a:rPr>
+              <a:t>•  Detecta al menos un proceso oculto comparando pslist y psscan, y documenta el PID.</a:t>
+            </a:r>
+          </a:p>
+          <a:p>
+            <a:pPr>
+              <a:spcAft>
+                <a:spcPts val="600"/>
+              </a:spcAft>
+            </a:pPr>
+            <a:r>
+              <a:rPr sz="1500">
+                <a:solidFill>
+                  <a:srgbClr val="22282E"/>
+                </a:solidFill>
+              </a:rPr>
+              <a:t>•  Extrae con dumpfiles el binario de un proceso malicioso y calcula su SHA-256 para búsqueda en VirusTotal (sin subir la muestra si es confidencial).</a:t>
+            </a:r>
+          </a:p>
+          <a:p>
+            <a:pPr>
+              <a:spcAft>
+                <a:spcPts val="600"/>
+              </a:spcAft>
+            </a:pPr>
+            <a:r>
+              <a:rPr sz="1500">
+                <a:solidFill>
+                  <a:srgbClr val="22282E"/>
+                </a:solidFill>
+              </a:rPr>
+              <a:t>•  Genera una timeline con timeliner.Timeliner y correlaciona una conexión de netscan con su proceso y su hora de creación.</a:t>
             </a:r>
           </a:p>
         </p:txBody>
@@ -3541,7 +3545,7 @@
                   <a:srgbClr val="0B3D2E"/>
                 </a:solidFill>
               </a:rPr>
-              <a:t>🔗 Referencias</a:t>
+              <a:t>📝 Reto verificable</a:t>
             </a:r>
           </a:p>
         </p:txBody>
@@ -3579,6 +3583,438 @@
                   <a:srgbClr val="22282E"/>
                 </a:solidFill>
               </a:rPr>
+              <a:t>•  Recibes el volcado incidente.raw de un host presuntamente comprometido con malware fileless. Criterio de aceptación: entregas un informe corto que (a) identifica el PID y nombre del proceso…</a:t>
+            </a:r>
+          </a:p>
+        </p:txBody>
+      </p:sp>
+    </p:spTree>
+  </p:cSld>
+  <p:clrMapOvr>
+    <a:masterClrMapping/>
+  </p:clrMapOvr>
+</p:sld>
+</file>
+
+<file path=ppt/slides/slide13.xml><?xml version="1.0" encoding="utf-8"?>
+<p:sld xmlns:a="http://schemas.openxmlformats.org/drawingml/2006/main" xmlns:p="http://schemas.openxmlformats.org/presentationml/2006/main" xmlns:r="http://schemas.openxmlformats.org/officeDocument/2006/relationships">
+  <p:cSld>
+    <p:spTree>
+      <p:nvGrpSpPr>
+        <p:cNvPr id="1" name=""/>
+        <p:cNvGrpSpPr/>
+        <p:nvPr/>
+      </p:nvGrpSpPr>
+      <p:grpSpPr/>
+      <p:sp>
+        <p:nvSpPr>
+          <p:cNvPr id="2" name="TextBox 1"/>
+          <p:cNvSpPr txBox="1"/>
+          <p:nvPr/>
+        </p:nvSpPr>
+        <p:spPr>
+          <a:xfrm>
+            <a:off x="457200" y="320040"/>
+            <a:ext cx="8229600" cy="822960"/>
+          </a:xfrm>
+          <a:prstGeom prst="rect">
+            <a:avLst/>
+          </a:prstGeom>
+          <a:noFill/>
+        </p:spPr>
+        <p:txBody>
+          <a:bodyPr wrap="square">
+            <a:spAutoFit/>
+          </a:bodyPr>
+          <a:lstStyle/>
+          <a:p>
+            <a:r>
+              <a:rPr sz="2600" b="1">
+                <a:solidFill>
+                  <a:srgbClr val="0B3D2E"/>
+                </a:solidFill>
+              </a:rPr>
+              <a:t>⚠️ Errores comunes</a:t>
+            </a:r>
+          </a:p>
+        </p:txBody>
+      </p:sp>
+      <p:sp>
+        <p:nvSpPr>
+          <p:cNvPr id="3" name="TextBox 2"/>
+          <p:cNvSpPr txBox="1"/>
+          <p:nvPr/>
+        </p:nvSpPr>
+        <p:spPr>
+          <a:xfrm>
+            <a:off x="457200" y="1280160"/>
+            <a:ext cx="8229600" cy="4937760"/>
+          </a:xfrm>
+          <a:prstGeom prst="rect">
+            <a:avLst/>
+          </a:prstGeom>
+          <a:noFill/>
+        </p:spPr>
+        <p:txBody>
+          <a:bodyPr wrap="square">
+            <a:spAutoFit/>
+          </a:bodyPr>
+          <a:lstStyle/>
+          <a:p>
+            <a:pPr>
+              <a:spcAft>
+                <a:spcPts val="600"/>
+              </a:spcAft>
+            </a:pPr>
+            <a:r>
+              <a:rPr sz="1500">
+                <a:solidFill>
+                  <a:srgbClr val="22282E"/>
+                </a:solidFill>
+              </a:rPr>
+              <a:t>•  Unable to validate the plugin requirements / no symbols — El ISF del kernel no se resolvió; actualiza volatility3 y sus symbol packs, o descarga el pack de símbolos correspondiente al build de Windows</a:t>
+            </a:r>
+          </a:p>
+          <a:p>
+            <a:pPr>
+              <a:spcAft>
+                <a:spcPts val="600"/>
+              </a:spcAft>
+            </a:pPr>
+            <a:r>
+              <a:rPr sz="1500">
+                <a:solidFill>
+                  <a:srgbClr val="22282E"/>
+                </a:solidFill>
+              </a:rPr>
+              <a:t>•  pslist no muestra un proceso que sabes que existía — Ocultamiento por DKOM; usa psscan que barre el pool en vez de seguir la lista enlazada</a:t>
+            </a:r>
+          </a:p>
+          <a:p>
+            <a:pPr>
+              <a:spcAft>
+                <a:spcPts val="600"/>
+              </a:spcAft>
+            </a:pPr>
+            <a:r>
+              <a:rPr sz="1500">
+                <a:solidFill>
+                  <a:srgbClr val="22282E"/>
+                </a:solidFill>
+              </a:rPr>
+              <a:t>•  malfind arroja decenas de hits — Muchos son legítimos (JIT de navegadores, .NET); filtra por regiones RWX privadas con contenido tipo MZ/shellcode</a:t>
+            </a:r>
+          </a:p>
+          <a:p>
+            <a:pPr>
+              <a:spcAft>
+                <a:spcPts val="600"/>
+              </a:spcAft>
+            </a:pPr>
+            <a:r>
+              <a:rPr sz="1500">
+                <a:solidFill>
+                  <a:srgbClr val="22282E"/>
+                </a:solidFill>
+              </a:rPr>
+              <a:t>•  Volcado tomado con la VM en ejecución da datos inconsistentes — Se capturó mientras la memoria cambiaba; para VMs prefiere pausar y usar el archivo .vmem/snapshot</a:t>
+            </a:r>
+          </a:p>
+          <a:p>
+            <a:pPr>
+              <a:spcAft>
+                <a:spcPts val="600"/>
+              </a:spcAft>
+            </a:pPr>
+            <a:r>
+              <a:rPr sz="1500">
+                <a:solidFill>
+                  <a:srgbClr val="22282E"/>
+                </a:solidFill>
+              </a:rPr>
+              <a:t>•  netscan no muestra conexiones esperadas — Kernel muy nuevo o pool reciclado; complementa con artefactos de disco (Sysmon Event ID 3)</a:t>
+            </a:r>
+          </a:p>
+          <a:p>
+            <a:pPr>
+              <a:spcAft>
+                <a:spcPts val="600"/>
+              </a:spcAft>
+            </a:pPr>
+            <a:r>
+              <a:rPr sz="1500">
+                <a:solidFill>
+                  <a:srgbClr val="22282E"/>
+                </a:solidFill>
+              </a:rPr>
+              <a:t>•  Hashes distintos del mismo volcado en dos equipos — Copia incompleta o corrupción de transferencia; re-copia y verifica cadena de custodia</a:t>
+            </a:r>
+          </a:p>
+        </p:txBody>
+      </p:sp>
+    </p:spTree>
+  </p:cSld>
+  <p:clrMapOvr>
+    <a:masterClrMapping/>
+  </p:clrMapOvr>
+</p:sld>
+</file>
+
+<file path=ppt/slides/slide14.xml><?xml version="1.0" encoding="utf-8"?>
+<p:sld xmlns:a="http://schemas.openxmlformats.org/drawingml/2006/main" xmlns:p="http://schemas.openxmlformats.org/presentationml/2006/main" xmlns:r="http://schemas.openxmlformats.org/officeDocument/2006/relationships">
+  <p:cSld>
+    <p:spTree>
+      <p:nvGrpSpPr>
+        <p:cNvPr id="1" name=""/>
+        <p:cNvGrpSpPr/>
+        <p:nvPr/>
+      </p:nvGrpSpPr>
+      <p:grpSpPr/>
+      <p:sp>
+        <p:nvSpPr>
+          <p:cNvPr id="2" name="TextBox 1"/>
+          <p:cNvSpPr txBox="1"/>
+          <p:nvPr/>
+        </p:nvSpPr>
+        <p:spPr>
+          <a:xfrm>
+            <a:off x="457200" y="320040"/>
+            <a:ext cx="8229600" cy="822960"/>
+          </a:xfrm>
+          <a:prstGeom prst="rect">
+            <a:avLst/>
+          </a:prstGeom>
+          <a:noFill/>
+        </p:spPr>
+        <p:txBody>
+          <a:bodyPr wrap="square">
+            <a:spAutoFit/>
+          </a:bodyPr>
+          <a:lstStyle/>
+          <a:p>
+            <a:r>
+              <a:rPr sz="2600" b="1">
+                <a:solidFill>
+                  <a:srgbClr val="0B3D2E"/>
+                </a:solidFill>
+              </a:rPr>
+              <a:t>❓ Preguntas frecuentes</a:t>
+            </a:r>
+          </a:p>
+        </p:txBody>
+      </p:sp>
+      <p:sp>
+        <p:nvSpPr>
+          <p:cNvPr id="3" name="TextBox 2"/>
+          <p:cNvSpPr txBox="1"/>
+          <p:nvPr/>
+        </p:nvSpPr>
+        <p:spPr>
+          <a:xfrm>
+            <a:off x="457200" y="1280160"/>
+            <a:ext cx="8229600" cy="4937760"/>
+          </a:xfrm>
+          <a:prstGeom prst="rect">
+            <a:avLst/>
+          </a:prstGeom>
+          <a:noFill/>
+        </p:spPr>
+        <p:txBody>
+          <a:bodyPr wrap="square">
+            <a:spAutoFit/>
+          </a:bodyPr>
+          <a:lstStyle/>
+          <a:p>
+            <a:pPr>
+              <a:spcAft>
+                <a:spcPts val="600"/>
+              </a:spcAft>
+            </a:pPr>
+            <a:r>
+              <a:rPr sz="1500">
+                <a:solidFill>
+                  <a:srgbClr val="22282E"/>
+                </a:solidFill>
+              </a:rPr>
+              <a:t>•  ❓ ¿Por qué Volatility 3 ya no usa "profiles"?</a:t>
+            </a:r>
+          </a:p>
+          <a:p>
+            <a:pPr>
+              <a:spcAft>
+                <a:spcPts val="600"/>
+              </a:spcAft>
+            </a:pPr>
+            <a:r>
+              <a:rPr sz="1500">
+                <a:solidFill>
+                  <a:srgbClr val="22282E"/>
+                </a:solidFill>
+              </a:rPr>
+              <a:t>•  V3 resuelve la estructura del kernel mediante symbol tables (ISF) descargadas o generadas automáticamente a partir del build del SO, eliminando el paso manual de elegir profile que era fuente de…</a:t>
+            </a:r>
+          </a:p>
+          <a:p>
+            <a:pPr>
+              <a:spcAft>
+                <a:spcPts val="600"/>
+              </a:spcAft>
+            </a:pPr>
+            <a:r>
+              <a:rPr sz="1500">
+                <a:solidFill>
+                  <a:srgbClr val="22282E"/>
+                </a:solidFill>
+              </a:rPr>
+              <a:t>•  ❓ ¿La adquisición altera la memoria?</a:t>
+            </a:r>
+          </a:p>
+          <a:p>
+            <a:pPr>
+              <a:spcAft>
+                <a:spcPts val="600"/>
+              </a:spcAft>
+            </a:pPr>
+            <a:r>
+              <a:rPr sz="1500">
+                <a:solidFill>
+                  <a:srgbClr val="22282E"/>
+                </a:solidFill>
+              </a:rPr>
+              <a:t>•  Sí, mínimamente: la propia herramienta ocupa RAM. Por eso se documenta la herramienta usada y se respeta el orden de volatilidad, capturando la RAM antes que cualquier acción intrusiva.</a:t>
+            </a:r>
+          </a:p>
+          <a:p>
+            <a:pPr>
+              <a:spcAft>
+                <a:spcPts val="600"/>
+              </a:spcAft>
+            </a:pPr>
+            <a:r>
+              <a:rPr sz="1500">
+                <a:solidFill>
+                  <a:srgbClr val="22282E"/>
+                </a:solidFill>
+              </a:rPr>
+              <a:t>•  ❓ ¿malfind prueba por sí solo que hay malware?</a:t>
+            </a:r>
+          </a:p>
+          <a:p>
+            <a:pPr>
+              <a:spcAft>
+                <a:spcPts val="600"/>
+              </a:spcAft>
+            </a:pPr>
+            <a:r>
+              <a:rPr sz="1500">
+                <a:solidFill>
+                  <a:srgbClr val="22282E"/>
+                </a:solidFill>
+              </a:rPr>
+              <a:t>•  No. Marca regiones sospechosas de inyección, pero hay falsos positivos legítimos. Confírmalo con el contenido de la región, la reputación del proceso y correlación con red y comandos.</a:t>
+            </a:r>
+          </a:p>
+          <a:p>
+            <a:pPr>
+              <a:spcAft>
+                <a:spcPts val="600"/>
+              </a:spcAft>
+            </a:pPr>
+            <a:r>
+              <a:rPr sz="1500">
+                <a:solidFill>
+                  <a:srgbClr val="22282E"/>
+                </a:solidFill>
+              </a:rPr>
+              <a:t>•  ❓ ¿Puedo analizar un volcado sin conocer la versión exacta de Windows?</a:t>
+            </a:r>
+          </a:p>
+        </p:txBody>
+      </p:sp>
+    </p:spTree>
+  </p:cSld>
+  <p:clrMapOvr>
+    <a:masterClrMapping/>
+  </p:clrMapOvr>
+</p:sld>
+</file>
+
+<file path=ppt/slides/slide15.xml><?xml version="1.0" encoding="utf-8"?>
+<p:sld xmlns:a="http://schemas.openxmlformats.org/drawingml/2006/main" xmlns:p="http://schemas.openxmlformats.org/presentationml/2006/main" xmlns:r="http://schemas.openxmlformats.org/officeDocument/2006/relationships">
+  <p:cSld>
+    <p:spTree>
+      <p:nvGrpSpPr>
+        <p:cNvPr id="1" name=""/>
+        <p:cNvGrpSpPr/>
+        <p:nvPr/>
+      </p:nvGrpSpPr>
+      <p:grpSpPr/>
+      <p:sp>
+        <p:nvSpPr>
+          <p:cNvPr id="2" name="TextBox 1"/>
+          <p:cNvSpPr txBox="1"/>
+          <p:nvPr/>
+        </p:nvSpPr>
+        <p:spPr>
+          <a:xfrm>
+            <a:off x="457200" y="320040"/>
+            <a:ext cx="8229600" cy="822960"/>
+          </a:xfrm>
+          <a:prstGeom prst="rect">
+            <a:avLst/>
+          </a:prstGeom>
+          <a:noFill/>
+        </p:spPr>
+        <p:txBody>
+          <a:bodyPr wrap="square">
+            <a:spAutoFit/>
+          </a:bodyPr>
+          <a:lstStyle/>
+          <a:p>
+            <a:r>
+              <a:rPr sz="2600" b="1">
+                <a:solidFill>
+                  <a:srgbClr val="0B3D2E"/>
+                </a:solidFill>
+              </a:rPr>
+              <a:t>🔗 Referencias</a:t>
+            </a:r>
+          </a:p>
+        </p:txBody>
+      </p:sp>
+      <p:sp>
+        <p:nvSpPr>
+          <p:cNvPr id="3" name="TextBox 2"/>
+          <p:cNvSpPr txBox="1"/>
+          <p:nvPr/>
+        </p:nvSpPr>
+        <p:spPr>
+          <a:xfrm>
+            <a:off x="457200" y="1280160"/>
+            <a:ext cx="8229600" cy="4937760"/>
+          </a:xfrm>
+          <a:prstGeom prst="rect">
+            <a:avLst/>
+          </a:prstGeom>
+          <a:noFill/>
+        </p:spPr>
+        <p:txBody>
+          <a:bodyPr wrap="square">
+            <a:spAutoFit/>
+          </a:bodyPr>
+          <a:lstStyle/>
+          <a:p>
+            <a:pPr>
+              <a:spcAft>
+                <a:spcPts val="600"/>
+              </a:spcAft>
+            </a:pPr>
+            <a:r>
+              <a:rPr sz="1500">
+                <a:solidFill>
+                  <a:srgbClr val="22282E"/>
+                </a:solidFill>
+              </a:rPr>
               <a:t>•  Ligh, Case, Levy, Walters — The Art of Memory Forensics (Wiley, 2014).</a:t>
             </a:r>
           </a:p>
@@ -3644,6 +4080,81 @@
           </a:p>
         </p:txBody>
       </p:sp>
+    </p:spTree>
+  </p:cSld>
+  <p:clrMapOvr>
+    <a:masterClrMapping/>
+  </p:clrMapOvr>
+</p:sld>
+</file>
+
+<file path=ppt/slides/slide16.xml><?xml version="1.0" encoding="utf-8"?>
+<p:sld xmlns:a="http://schemas.openxmlformats.org/drawingml/2006/main" xmlns:p="http://schemas.openxmlformats.org/presentationml/2006/main" xmlns:r="http://schemas.openxmlformats.org/officeDocument/2006/relationships">
+  <p:cSld>
+    <p:spTree>
+      <p:nvGrpSpPr>
+        <p:cNvPr id="1" name=""/>
+        <p:cNvGrpSpPr/>
+        <p:nvPr/>
+      </p:nvGrpSpPr>
+      <p:grpSpPr/>
+      <p:sp>
+        <p:nvSpPr>
+          <p:cNvPr id="2" name="TextBox 1"/>
+          <p:cNvSpPr txBox="1"/>
+          <p:nvPr/>
+        </p:nvSpPr>
+        <p:spPr>
+          <a:xfrm>
+            <a:off x="457200" y="274320"/>
+            <a:ext cx="8229600" cy="640080"/>
+          </a:xfrm>
+          <a:prstGeom prst="rect">
+            <a:avLst/>
+          </a:prstGeom>
+          <a:noFill/>
+        </p:spPr>
+        <p:txBody>
+          <a:bodyPr wrap="square">
+            <a:spAutoFit/>
+          </a:bodyPr>
+          <a:lstStyle/>
+          <a:p>
+            <a:r>
+              <a:rPr sz="2200" b="1">
+                <a:solidFill>
+                  <a:srgbClr val="0B3D2E"/>
+                </a:solidFill>
+              </a:rPr>
+              <a:t>Diagrama de la clase</a:t>
+            </a:r>
+          </a:p>
+        </p:txBody>
+      </p:sp>
+      <p:pic>
+        <p:nvPicPr>
+          <p:cNvPr id="3" name="Picture 2" descr="986358d667d77ae8.png"/>
+          <p:cNvPicPr>
+            <a:picLocks noChangeAspect="1"/>
+          </p:cNvPicPr>
+          <p:nvPr/>
+        </p:nvPicPr>
+        <p:blipFill>
+          <a:blip r:embed="rId2"/>
+          <a:stretch>
+            <a:fillRect/>
+          </a:stretch>
+        </p:blipFill>
+        <p:spPr>
+          <a:xfrm>
+            <a:off x="457200" y="3305225"/>
+            <a:ext cx="8229600" cy="887630"/>
+          </a:xfrm>
+          <a:prstGeom prst="rect">
+            <a:avLst/>
+          </a:prstGeom>
+        </p:spPr>
+      </p:pic>
     </p:spTree>
   </p:cSld>
   <p:clrMapOvr>
@@ -3728,7 +4239,7 @@
                   <a:srgbClr val="22282E"/>
                 </a:solidFill>
               </a:rPr>
-              <a:t>•  Dominar el análisis forense de memoria RAM con Volatility 3 como herramienta central: desde la adquisición correcta de un volcado hasta la caza de inyección de código, procesos ocultos, hooks y rootkits que solo viven en memoria. Al terminar, el alumno sabrá reconstruir la actividad de un atacante que nunca tocó el disco (malware fileless) y respaldar sus hallazgos con evidencia reproducible, tal como se exige en la certificación GCFA y en el módulo forense de BTL1.</a:t>
+              <a:t>•  Dominar el análisis forense de memoria RAM con Volatility 3 como herramienta central: desde la adquisición correcta de un volcado hasta la caza de inyección de código, procesos ocultos, hooks y…</a:t>
             </a:r>
           </a:p>
         </p:txBody>
@@ -4137,7 +4648,7 @@
                   <a:srgbClr val="0B3D2E"/>
                 </a:solidFill>
               </a:rPr>
-              <a:t>📖 Definiciones y características</a:t>
+              <a:t>🧠 Modelo mental y caso de decisión</a:t>
             </a:r>
           </a:p>
         </p:txBody>
@@ -4175,97 +4686,22 @@
                   <a:srgbClr val="22282E"/>
                 </a:solidFill>
               </a:rPr>
-              <a:t>•  Volcado de memoria (memory dump): copia byte a byte de la RAM física en un instante. Característica clave: contiene datos que nunca se escriben a disco (claves, procesos, comandos).</a:t>
-            </a:r>
-          </a:p>
-          <a:p>
-            <a:pPr>
-              <a:spcAft>
-                <a:spcPts val="600"/>
-              </a:spcAft>
-            </a:pPr>
-            <a:r>
-              <a:rPr sz="1500">
-                <a:solidFill>
-                  <a:srgbClr val="22282E"/>
-                </a:solidFill>
-              </a:rPr>
-              <a:t>•  Orden de volatilidad (RFC 3227): principio que obliga a capturar primero lo más efímero (RAM, caché) antes que lo persistente (disco). Característica clave: la memoria se altera con cada acción, incluso al observarla.</a:t>
-            </a:r>
-          </a:p>
-          <a:p>
-            <a:pPr>
-              <a:spcAft>
-                <a:spcPts val="600"/>
-              </a:spcAft>
-            </a:pPr>
-            <a:r>
-              <a:rPr sz="1500">
-                <a:solidFill>
-                  <a:srgbClr val="22282E"/>
-                </a:solidFill>
-              </a:rPr>
-              <a:t>•  Symbol table / ISF (Intermediate Symbol Format): en Volatility 3, JSON que mapea estructuras del kernel a offsets. Característica clave: sustituye a los "profiles" de V2 y se resuelve casi siempre en automático.</a:t>
-            </a:r>
-          </a:p>
-          <a:p>
-            <a:pPr>
-              <a:spcAft>
-                <a:spcPts val="600"/>
-              </a:spcAft>
-            </a:pPr>
-            <a:r>
-              <a:rPr sz="1500">
-                <a:solidFill>
-                  <a:srgbClr val="22282E"/>
-                </a:solidFill>
-              </a:rPr>
-              <a:t>•  malfind: plugin que localiza regiones de memoria privadas, ejecutables y sin respaldo en disco. Característica clave: revela shellcode inyectado y process hollowing.</a:t>
-            </a:r>
-          </a:p>
-          <a:p>
-            <a:pPr>
-              <a:spcAft>
-                <a:spcPts val="600"/>
-              </a:spcAft>
-            </a:pPr>
-            <a:r>
-              <a:rPr sz="1500">
-                <a:solidFill>
-                  <a:srgbClr val="22282E"/>
-                </a:solidFill>
-              </a:rPr>
-              <a:t>•  DKOM (Direct Kernel Object Manipulation): técnica de rootkit que desenlaza el objeto EPROCESS de la lista doblemente enlazada. Característica clave: oculta el proceso a pslist pero no a psscan (que barre el pool).</a:t>
-            </a:r>
-          </a:p>
-          <a:p>
-            <a:pPr>
-              <a:spcAft>
-                <a:spcPts val="600"/>
-              </a:spcAft>
-            </a:pPr>
-            <a:r>
-              <a:rPr sz="1500">
-                <a:solidFill>
-                  <a:srgbClr val="22282E"/>
-                </a:solidFill>
-              </a:rPr>
-              <a:t>•  Process hollowing: vaciar un proceso legítimo suspendido y sustituir su imagen por código malicioso. Característica clave: PID legítimo, ruta legítima, contenido malicioso.</a:t>
-            </a:r>
-          </a:p>
-          <a:p>
-            <a:pPr>
-              <a:spcAft>
-                <a:spcPts val="600"/>
-              </a:spcAft>
-            </a:pPr>
-            <a:r>
-              <a:rPr sz="1500">
-                <a:solidFill>
-                  <a:srgbClr val="22282E"/>
-                </a:solidFill>
-              </a:rPr>
-              <a:t>•  Fileless malware: código que se ejecuta solo en memoria (PowerShell reflectivo, inyección). Característica clave: no deja archivo en disco; la memoria es a menudo la única fuente de evidencia.</a:t>
+              <a:t>•  Memoria es una captura temporal cuya interpretación depende de adquisición, símbolos, contexto y corroboración.</a:t>
+            </a:r>
+          </a:p>
+          <a:p>
+            <a:pPr>
+              <a:spcAft>
+                <a:spcPts val="600"/>
+              </a:spcAft>
+            </a:pPr>
+            <a:r>
+              <a:rPr sz="1500">
+                <a:solidFill>
+                  <a:srgbClr val="22282E"/>
+                </a:solidFill>
+              </a:rPr>
+              <a:t>•  Caso razonado. Un proceso sin ruta parece malicioso pero corresponde a memoria incompleta; se contrasta con VAD y disco.</a:t>
             </a:r>
           </a:p>
         </p:txBody>
@@ -4316,7 +4752,7 @@
                   <a:srgbClr val="0B3D2E"/>
                 </a:solidFill>
               </a:rPr>
-              <a:t>🧰 Herramientas y preparación</a:t>
+              <a:t>📔 Glosario operativo complementario</a:t>
             </a:r>
           </a:p>
         </p:txBody>
@@ -4354,97 +4790,52 @@
                   <a:srgbClr val="22282E"/>
                 </a:solidFill>
               </a:rPr>
-              <a:t>•  Volatility 3 (pip install volatility3), motor de análisis principal.</a:t>
-            </a:r>
-          </a:p>
-          <a:p>
-            <a:pPr>
-              <a:spcAft>
-                <a:spcPts val="600"/>
-              </a:spcAft>
-            </a:pPr>
-            <a:r>
-              <a:rPr sz="1500">
-                <a:solidFill>
-                  <a:srgbClr val="22282E"/>
-                </a:solidFill>
-              </a:rPr>
-              <a:t>•  Adquisición Windows: WinPmem (winpmemminix64.exe), FTK Imager, DumpIt, Magnet RAM Capture.</a:t>
-            </a:r>
-          </a:p>
-          <a:p>
-            <a:pPr>
-              <a:spcAft>
-                <a:spcPts val="600"/>
-              </a:spcAft>
-            </a:pPr>
-            <a:r>
-              <a:rPr sz="1500">
-                <a:solidFill>
-                  <a:srgbClr val="22282E"/>
-                </a:solidFill>
-              </a:rPr>
-              <a:t>•  Adquisición Linux: LiME (Linux Memory Extractor) + módulo kernel, o AVML de Microsoft.</a:t>
-            </a:r>
-          </a:p>
-          <a:p>
-            <a:pPr>
-              <a:spcAft>
-                <a:spcPts val="600"/>
-              </a:spcAft>
-            </a:pPr>
-            <a:r>
-              <a:rPr sz="1500">
-                <a:solidFill>
-                  <a:srgbClr val="22282E"/>
-                </a:solidFill>
-              </a:rPr>
-              <a:t>•  Muestras de práctica seguras: volcados públicos de retos (p. ej. los memory samples del wiki de Volatility, MemLabs, retos de BTL1/CyberDefenders). Evitan tener que infectar una máquina real.</a:t>
-            </a:r>
-          </a:p>
-          <a:p>
-            <a:pPr>
-              <a:spcAft>
-                <a:spcPts val="600"/>
-              </a:spcAft>
-            </a:pPr>
-            <a:r>
-              <a:rPr sz="1500">
-                <a:solidFill>
-                  <a:srgbClr val="22282E"/>
-                </a:solidFill>
-              </a:rPr>
-              <a:t>•  Utilidades de apoyo: strings, yara, capa, un editor hexadecimal y sha256sum para hashing.</a:t>
-            </a:r>
-          </a:p>
-          <a:p>
-            <a:pPr>
-              <a:spcAft>
-                <a:spcPts val="600"/>
-              </a:spcAft>
-            </a:pPr>
-            <a:r>
-              <a:rPr sz="1500">
-                <a:solidFill>
-                  <a:srgbClr val="22282E"/>
-                </a:solidFill>
-              </a:rPr>
-              <a:t>•  Verifica la instalación:</a:t>
-            </a:r>
-          </a:p>
-          <a:p>
-            <a:pPr>
-              <a:spcAft>
-                <a:spcPts val="600"/>
-              </a:spcAft>
-            </a:pPr>
-            <a:r>
-              <a:rPr sz="1500">
-                <a:solidFill>
-                  <a:srgbClr val="22282E"/>
-                </a:solidFill>
-              </a:rPr>
-              <a:t>•  python3 -m volatility3.cli --help</a:t>
+              <a:t>•  Término — Definición</a:t>
+            </a:r>
+          </a:p>
+          <a:p>
+            <a:pPr>
+              <a:spcAft>
+                <a:spcPts val="600"/>
+              </a:spcAft>
+            </a:pPr>
+            <a:r>
+              <a:rPr sz="1500">
+                <a:solidFill>
+                  <a:srgbClr val="22282E"/>
+                </a:solidFill>
+              </a:rPr>
+              <a:t>•  Evidencia — Información cuya procedencia y relación con un criterio pueden revisarse.</a:t>
+            </a:r>
+          </a:p>
+          <a:p>
+            <a:pPr>
+              <a:spcAft>
+                <a:spcPts val="600"/>
+              </a:spcAft>
+            </a:pPr>
+            <a:r>
+              <a:rPr sz="1500">
+                <a:solidFill>
+                  <a:srgbClr val="22282E"/>
+                </a:solidFill>
+              </a:rPr>
+              <a:t>•  Supuesto — Condición declarada de la que depende una conclusión.</a:t>
+            </a:r>
+          </a:p>
+          <a:p>
+            <a:pPr>
+              <a:spcAft>
+                <a:spcPts val="600"/>
+              </a:spcAft>
+            </a:pPr>
+            <a:r>
+              <a:rPr sz="1500">
+                <a:solidFill>
+                  <a:srgbClr val="22282E"/>
+                </a:solidFill>
+              </a:rPr>
+              <a:t>•  Riesgo residual — Exposición que permanece después del tratamiento.</a:t>
             </a:r>
           </a:p>
         </p:txBody>
@@ -4495,7 +4886,7 @@
                   <a:srgbClr val="0B3D2E"/>
                 </a:solidFill>
               </a:rPr>
-              <a:t>🧪 Laboratorio guiado</a:t>
+              <a:t>✅ Criterio de dominio</a:t>
             </a:r>
           </a:p>
         </p:txBody>
@@ -4533,97 +4924,7 @@
                   <a:srgbClr val="22282E"/>
                 </a:solidFill>
               </a:rPr>
-              <a:t>•  Trabajaremos sobre un volcado Windows llamado caso.raw. Reemplaza el nombre por tu muestra de práctica.</a:t>
-            </a:r>
-          </a:p>
-          <a:p>
-            <a:pPr>
-              <a:spcAft>
-                <a:spcPts val="600"/>
-              </a:spcAft>
-            </a:pPr>
-            <a:r>
-              <a:rPr sz="1500">
-                <a:solidFill>
-                  <a:srgbClr val="22282E"/>
-                </a:solidFill>
-              </a:rPr>
-              <a:t>•  Preserva la evidencia. Antes de tocar nada, calcula y registra el hash:</a:t>
-            </a:r>
-          </a:p>
-          <a:p>
-            <a:pPr>
-              <a:spcAft>
-                <a:spcPts val="600"/>
-              </a:spcAft>
-            </a:pPr>
-            <a:r>
-              <a:rPr sz="1500">
-                <a:solidFill>
-                  <a:srgbClr val="22282E"/>
-                </a:solidFill>
-              </a:rPr>
-              <a:t>•  sha256sum caso.raw | tee caso.raw.sha256</a:t>
-            </a:r>
-          </a:p>
-          <a:p>
-            <a:pPr>
-              <a:spcAft>
-                <a:spcPts val="600"/>
-              </a:spcAft>
-            </a:pPr>
-            <a:r>
-              <a:rPr sz="1500">
-                <a:solidFill>
-                  <a:srgbClr val="22282E"/>
-                </a:solidFill>
-              </a:rPr>
-              <a:t>•  Identifica el perfil/entorno del volcado:</a:t>
-            </a:r>
-          </a:p>
-          <a:p>
-            <a:pPr>
-              <a:spcAft>
-                <a:spcPts val="600"/>
-              </a:spcAft>
-            </a:pPr>
-            <a:r>
-              <a:rPr sz="1500">
-                <a:solidFill>
-                  <a:srgbClr val="22282E"/>
-                </a:solidFill>
-              </a:rPr>
-              <a:t>•  vol -f caso.raw windows.info</a:t>
-            </a:r>
-          </a:p>
-          <a:p>
-            <a:pPr>
-              <a:spcAft>
-                <a:spcPts val="600"/>
-              </a:spcAft>
-            </a:pPr>
-            <a:r>
-              <a:rPr sz="1500">
-                <a:solidFill>
-                  <a:srgbClr val="22282E"/>
-                </a:solidFill>
-              </a:rPr>
-              <a:t>•  Anota versión de kernel, arquitectura y hora del sistema: fija el marco temporal del análisis.</a:t>
-            </a:r>
-          </a:p>
-          <a:p>
-            <a:pPr>
-              <a:spcAft>
-                <a:spcPts val="600"/>
-              </a:spcAft>
-            </a:pPr>
-            <a:r>
-              <a:rPr sz="1500">
-                <a:solidFill>
-                  <a:srgbClr val="22282E"/>
-                </a:solidFill>
-              </a:rPr>
-              <a:t>•  Enumera procesos y su jerarquía:</a:t>
+              <a:t>•  El alumno demuestra dominio cuando explica el diagrama, resuelve el caso con evidencia, declara límites y puede defender por qué su decisión cambia si cambia un supuesto.</a:t>
             </a:r>
           </a:p>
         </p:txBody>
@@ -4674,7 +4975,7 @@
                   <a:srgbClr val="0B3D2E"/>
                 </a:solidFill>
               </a:rPr>
-              <a:t>✍️ Ejercicios</a:t>
+              <a:t>📖 Definiciones y características</a:t>
             </a:r>
           </a:p>
         </p:txBody>
@@ -4712,82 +5013,97 @@
                   <a:srgbClr val="22282E"/>
                 </a:solidFill>
               </a:rPr>
-              <a:t>•  Adquiere un volcado de tu propia VM de práctica con WinPmem y verifica su hash antes y después de copiarlo.</a:t>
-            </a:r>
-          </a:p>
-          <a:p>
-            <a:pPr>
-              <a:spcAft>
-                <a:spcPts val="600"/>
-              </a:spcAft>
-            </a:pPr>
-            <a:r>
-              <a:rPr sz="1500">
-                <a:solidFill>
-                  <a:srgbClr val="22282E"/>
-                </a:solidFill>
-              </a:rPr>
-              <a:t>•  En una muestra de práctica, lista los tres procesos con padre más sospechoso y justifica por qué usando pstree.</a:t>
-            </a:r>
-          </a:p>
-          <a:p>
-            <a:pPr>
-              <a:spcAft>
-                <a:spcPts val="600"/>
-              </a:spcAft>
-            </a:pPr>
-            <a:r>
-              <a:rPr sz="1500">
-                <a:solidFill>
-                  <a:srgbClr val="22282E"/>
-                </a:solidFill>
-              </a:rPr>
-              <a:t>•  Ejecuta malfind y clasifica cada hit como probable inyección o falso positivo, explicando el criterio.</a:t>
-            </a:r>
-          </a:p>
-          <a:p>
-            <a:pPr>
-              <a:spcAft>
-                <a:spcPts val="600"/>
-              </a:spcAft>
-            </a:pPr>
-            <a:r>
-              <a:rPr sz="1500">
-                <a:solidFill>
-                  <a:srgbClr val="22282E"/>
-                </a:solidFill>
-              </a:rPr>
-              <a:t>•  Detecta al menos un proceso oculto comparando pslist y psscan, y documenta el PID.</a:t>
-            </a:r>
-          </a:p>
-          <a:p>
-            <a:pPr>
-              <a:spcAft>
-                <a:spcPts val="600"/>
-              </a:spcAft>
-            </a:pPr>
-            <a:r>
-              <a:rPr sz="1500">
-                <a:solidFill>
-                  <a:srgbClr val="22282E"/>
-                </a:solidFill>
-              </a:rPr>
-              <a:t>•  Extrae con dumpfiles el binario de un proceso malicioso y calcula su SHA-256 para búsqueda en VirusTotal (sin subir la muestra si es confidencial).</a:t>
-            </a:r>
-          </a:p>
-          <a:p>
-            <a:pPr>
-              <a:spcAft>
-                <a:spcPts val="600"/>
-              </a:spcAft>
-            </a:pPr>
-            <a:r>
-              <a:rPr sz="1500">
-                <a:solidFill>
-                  <a:srgbClr val="22282E"/>
-                </a:solidFill>
-              </a:rPr>
-              <a:t>•  Genera una timeline con timeliner.Timeliner y correlaciona una conexión de netscan con su proceso y su hora de creación.</a:t>
+              <a:t>•  Volcado de memoria (memory dump): copia byte a byte de la RAM física en un instante. Característica clave: contiene datos que nunca se escriben a disco (claves, procesos, comandos).</a:t>
+            </a:r>
+          </a:p>
+          <a:p>
+            <a:pPr>
+              <a:spcAft>
+                <a:spcPts val="600"/>
+              </a:spcAft>
+            </a:pPr>
+            <a:r>
+              <a:rPr sz="1500">
+                <a:solidFill>
+                  <a:srgbClr val="22282E"/>
+                </a:solidFill>
+              </a:rPr>
+              <a:t>•  Orden de volatilidad (RFC 3227): principio que obliga a capturar primero lo más efímero (RAM, caché) antes que lo persistente (disco). Característica clave: la memoria se altera con cada acción…</a:t>
+            </a:r>
+          </a:p>
+          <a:p>
+            <a:pPr>
+              <a:spcAft>
+                <a:spcPts val="600"/>
+              </a:spcAft>
+            </a:pPr>
+            <a:r>
+              <a:rPr sz="1500">
+                <a:solidFill>
+                  <a:srgbClr val="22282E"/>
+                </a:solidFill>
+              </a:rPr>
+              <a:t>•  Symbol table / ISF (Intermediate Symbol Format): en Volatility 3, JSON que mapea estructuras del kernel a offsets. Característica clave: sustituye a los "profiles" de V2 y se resuelve casi siempre en…</a:t>
+            </a:r>
+          </a:p>
+          <a:p>
+            <a:pPr>
+              <a:spcAft>
+                <a:spcPts val="600"/>
+              </a:spcAft>
+            </a:pPr>
+            <a:r>
+              <a:rPr sz="1500">
+                <a:solidFill>
+                  <a:srgbClr val="22282E"/>
+                </a:solidFill>
+              </a:rPr>
+              <a:t>•  malfind: plugin que localiza regiones de memoria privadas, ejecutables y sin respaldo en disco. Característica clave: revela shellcode inyectado y process hollowing.</a:t>
+            </a:r>
+          </a:p>
+          <a:p>
+            <a:pPr>
+              <a:spcAft>
+                <a:spcPts val="600"/>
+              </a:spcAft>
+            </a:pPr>
+            <a:r>
+              <a:rPr sz="1500">
+                <a:solidFill>
+                  <a:srgbClr val="22282E"/>
+                </a:solidFill>
+              </a:rPr>
+              <a:t>•  DKOM (Direct Kernel Object Manipulation): técnica de rootkit que desenlaza el objeto EPROCESS de la lista doblemente enlazada. Característica clave: oculta el proceso a pslist pero no a psscan (que…</a:t>
+            </a:r>
+          </a:p>
+          <a:p>
+            <a:pPr>
+              <a:spcAft>
+                <a:spcPts val="600"/>
+              </a:spcAft>
+            </a:pPr>
+            <a:r>
+              <a:rPr sz="1500">
+                <a:solidFill>
+                  <a:srgbClr val="22282E"/>
+                </a:solidFill>
+              </a:rPr>
+              <a:t>•  Process hollowing: vaciar un proceso legítimo suspendido y sustituir su imagen por código malicioso. Característica clave: PID legítimo, ruta legítima, contenido malicioso.</a:t>
+            </a:r>
+          </a:p>
+          <a:p>
+            <a:pPr>
+              <a:spcAft>
+                <a:spcPts val="600"/>
+              </a:spcAft>
+            </a:pPr>
+            <a:r>
+              <a:rPr sz="1500">
+                <a:solidFill>
+                  <a:srgbClr val="22282E"/>
+                </a:solidFill>
+              </a:rPr>
+              <a:t>•  Fileless malware: código que se ejecuta solo en memoria (PowerShell reflectivo, inyección). Característica clave: no deja archivo en disco; la memoria es a menudo la única fuente de evidencia.</a:t>
             </a:r>
           </a:p>
         </p:txBody>
@@ -4838,7 +5154,7 @@
                   <a:srgbClr val="0B3D2E"/>
                 </a:solidFill>
               </a:rPr>
-              <a:t>📝 Reto verificable</a:t>
+              <a:t>🧰 Herramientas y preparación</a:t>
             </a:r>
           </a:p>
         </p:txBody>
@@ -4876,7 +5192,82 @@
                   <a:srgbClr val="22282E"/>
                 </a:solidFill>
               </a:rPr>
-              <a:t>•  Recibes el volcado incidente.raw de un host presuntamente comprometido con malware fileless. Criterio de aceptación: entregas un informe corto que (a) identifica el PID y nombre del proceso inyectado, (b) muestra la salida de malfind que lo prueba, (c) lista la IP/puerto de C2 obtenida de netscan correlacionada con ese PID, y (d) incluye el SHA-256 del artefacto extraído con dumpfiles. El reto se considera logrado si otro analista puede reproducir tus hallazgos ejecutando los mismos comandos sobre el mismo volcado.</a:t>
+              <a:t>•  Volatility 3 (pip install volatility3), motor de análisis principal.</a:t>
+            </a:r>
+          </a:p>
+          <a:p>
+            <a:pPr>
+              <a:spcAft>
+                <a:spcPts val="600"/>
+              </a:spcAft>
+            </a:pPr>
+            <a:r>
+              <a:rPr sz="1500">
+                <a:solidFill>
+                  <a:srgbClr val="22282E"/>
+                </a:solidFill>
+              </a:rPr>
+              <a:t>•  Adquisición Windows: WinPmem (winpmemminix64.exe), FTK Imager, DumpIt, Magnet RAM Capture.</a:t>
+            </a:r>
+          </a:p>
+          <a:p>
+            <a:pPr>
+              <a:spcAft>
+                <a:spcPts val="600"/>
+              </a:spcAft>
+            </a:pPr>
+            <a:r>
+              <a:rPr sz="1500">
+                <a:solidFill>
+                  <a:srgbClr val="22282E"/>
+                </a:solidFill>
+              </a:rPr>
+              <a:t>•  Adquisición Linux: LiME (Linux Memory Extractor) + módulo kernel, o AVML de Microsoft.</a:t>
+            </a:r>
+          </a:p>
+          <a:p>
+            <a:pPr>
+              <a:spcAft>
+                <a:spcPts val="600"/>
+              </a:spcAft>
+            </a:pPr>
+            <a:r>
+              <a:rPr sz="1500">
+                <a:solidFill>
+                  <a:srgbClr val="22282E"/>
+                </a:solidFill>
+              </a:rPr>
+              <a:t>•  Muestras de práctica seguras: volcados públicos de retos (p. ej. los memory samples del wiki de Volatility, MemLabs, retos de BTL1/CyberDefenders). Evitan tener que infectar una máquina real.</a:t>
+            </a:r>
+          </a:p>
+          <a:p>
+            <a:pPr>
+              <a:spcAft>
+                <a:spcPts val="600"/>
+              </a:spcAft>
+            </a:pPr>
+            <a:r>
+              <a:rPr sz="1500">
+                <a:solidFill>
+                  <a:srgbClr val="22282E"/>
+                </a:solidFill>
+              </a:rPr>
+              <a:t>•  Utilidades de apoyo: strings, yara, capa, un editor hexadecimal y sha256sum para hashing.</a:t>
+            </a:r>
+          </a:p>
+          <a:p>
+            <a:pPr>
+              <a:spcAft>
+                <a:spcPts val="600"/>
+              </a:spcAft>
+            </a:pPr>
+            <a:r>
+              <a:rPr sz="1500">
+                <a:solidFill>
+                  <a:srgbClr val="22282E"/>
+                </a:solidFill>
+              </a:rPr>
+              <a:t>•  Verifica la instalación:</a:t>
             </a:r>
           </a:p>
         </p:txBody>
